--- a/deck/NeonNull_Amalgam_Finale.pptx
+++ b/deck/NeonNull_Amalgam_Finale.pptx
@@ -513,7 +513,7 @@
           <a:p>
             <a:r>
               <a:rPr lang="en-US" dirty="0"/>
-              <a:t>Seven polymer properties from SMILES. Our approach is built around one measured fact: six of the seven are the same physics, and five of them have almost no data.</a:t>
+              <a:t/>
             </a:r>
             <a:endParaRPr lang="en-US" dirty="0"/>
           </a:p>
@@ -601,7 +601,7 @@
           <a:p>
             <a:r>
               <a:rPr lang="en-US" dirty="0"/>
-              <a:t>The paradigm shift is that we stopped asking which model is best and started asking which targets belong together.</a:t>
+              <a:t/>
             </a:r>
             <a:endParaRPr lang="en-US" dirty="0"/>
           </a:p>
@@ -689,7 +689,7 @@
           <a:p>
             <a:r>
               <a:rPr lang="en-US" dirty="0"/>
-              <a:t>Determinism matters because the hosts re-run the pinned notebook. Single-threading cost nothing because the graphs are small.</a:t>
+              <a:t/>
             </a:r>
             <a:endParaRPr lang="en-US" dirty="0"/>
           </a:p>
@@ -777,7 +777,7 @@
           <a:p>
             <a:r>
               <a:rPr lang="en-US" dirty="0"/>
-              <a:t>The model is legible: its feature importance concentrates on the backbone block, so for a new polymer it reports not just the predicted value but which structural motifs drive it.</a:t>
+              <a:t/>
             </a:r>
             <a:endParaRPr lang="en-US" dirty="0"/>
           </a:p>
@@ -865,7 +865,7 @@
           <a:p>
             <a:r>
               <a:rPr lang="en-US" dirty="0"/>
-              <a:t>Because the metric averages per-target R2 without weighting, the five small targets carry five sevenths of the score while contributing a seventh of the data. Everything we did follows from that.</a:t>
+              <a:t/>
             </a:r>
             <a:endParaRPr lang="en-US" dirty="0"/>
           </a:p>
@@ -953,7 +953,7 @@
           <a:p>
             <a:r>
               <a:rPr lang="en-US" dirty="0"/>
-              <a:t>This measurement, not a hyperparameter search, dictated the architecture. Six targets share an encoder; Tg does not.</a:t>
+              <a:t/>
             </a:r>
             <a:endParaRPr lang="en-US" dirty="0"/>
           </a:p>
@@ -1041,7 +1041,7 @@
           <a:p>
             <a:r>
               <a:rPr lang="en-US" dirty="0"/>
-              <a:t>Tree path: RDKit descriptors, fingerprints, and our polymer backbone features. Graph path: a message-passing network. The multi-task encoder serves the six electronic targets through six heads; each row trains only its own head. Blend weights fitted per target on out-of-fold predictions.</a:t>
+              <a:t/>
             </a:r>
             <a:endParaRPr lang="en-US" dirty="0"/>
           </a:p>
@@ -1129,7 +1129,7 @@
           <a:p>
             <a:r>
               <a:rPr lang="en-US" dirty="0"/>
-              <a:t>The smallest targets gain most. Refractive index, with 229 rows, gains 0.041 R2 purely from borrowing a representation learned on 3,266 electronic rows.</a:t>
+              <a:t/>
             </a:r>
             <a:endParaRPr lang="en-US" dirty="0"/>
           </a:p>
@@ -1217,7 +1217,7 @@
           <a:p>
             <a:r>
               <a:rPr lang="en-US" dirty="0"/>
-              <a:t>The multi-task column is the story: it beats the per-target models on every one of the six, and the blend adds a little more.</a:t>
+              <a:t/>
             </a:r>
             <a:endParaRPr lang="en-US" dirty="0"/>
           </a:p>
@@ -1305,7 +1305,7 @@
           <a:p>
             <a:r>
               <a:rPr lang="en-US" dirty="0"/>
-              <a:t>Orange panels are the 220-row targets. They are noisier, as expected, but no longer unusable.</a:t>
+              <a:t/>
             </a:r>
             <a:endParaRPr lang="en-US" dirty="0"/>
           </a:p>
@@ -1393,7 +1393,7 @@
           <a:p>
             <a:r>
               <a:rPr lang="en-US" dirty="0"/>
-              <a:t>Nothing in cross-validation reveals this, because train and test SMILES are each written one particular way. It only appears if you deliberately re-spell the molecules.</a:t>
+              <a:t/>
             </a:r>
             <a:endParaRPr lang="en-US" dirty="0"/>
           </a:p>
@@ -1481,7 +1481,7 @@
           <a:p>
             <a:r>
               <a:rPr lang="en-US" dirty="0"/>
-              <a:t>We report the pretraining result as a negative rather than omitting it. The auxiliary dataset was the one the organizers highlighted, and the honest finding is that it did not transfer.</a:t>
+              <a:t/>
             </a:r>
             <a:endParaRPr lang="en-US" dirty="0"/>
           </a:p>
@@ -2534,7 +2534,7 @@
                 <a:ea typeface="Calibri" pitchFamily="34" charset="-122"/>
                 <a:cs typeface="Calibri" pitchFamily="34" charset="-120"/>
               </a:rPr>
-              <a:t>Same technique that failed in Round 2, now +0.0157 — because these six targets are one physical quantity.</a:t>
+              <a:t>Same technique that failed in Round 2, now +0.0157 — because these six targets are one physical quantity. Ten folds instead of five added +0.0058 more.</a:t>
             </a:r>
             <a:endParaRPr lang="en-US" sz="1350" dirty="0"/>
           </a:p>
@@ -2929,7 +2929,7 @@
                 <a:ea typeface="Calibri" pitchFamily="34" charset="-122"/>
                 <a:cs typeface="Calibri" pitchFamily="34" charset="-120"/>
               </a:rPr>
-              <a:t>multi-task</a:t>
+              <a:t>multi-task encoder</a:t>
             </a:r>
             <a:endParaRPr lang="en-US" sz="1200" dirty="0"/>
           </a:p>
@@ -2995,7 +2995,7 @@
                 <a:ea typeface="Cambria" pitchFamily="34" charset="-122"/>
                 <a:cs typeface="Cambria" pitchFamily="34" charset="-120"/>
               </a:rPr>
-              <a:t>3h 20m</a:t>
+              <a:t>4h 43m</a:t>
             </a:r>
             <a:endParaRPr lang="en-US" sz="4400" dirty="0"/>
           </a:p>
@@ -3494,8 +3494,8 @@
         </p:nvSpPr>
         <p:spPr>
           <a:xfrm>
-            <a:off x="822960" y="5989320"/>
-            <a:ext cx="10515600" cy="365760"/>
+            <a:off x="822960" y="5532120"/>
+            <a:ext cx="10515600" cy="548640"/>
           </a:xfrm>
           <a:prstGeom prst="rect">
             <a:avLst/>
@@ -3511,7 +3511,7 @@
               <a:buNone/>
             </a:pPr>
             <a:r>
-              <a:rPr lang="en-US" sz="1200" dirty="0">
+              <a:rPr lang="en-US" sz="1050" dirty="0">
                 <a:solidFill>
                   <a:srgbClr val="8FA3D9"/>
                 </a:solidFill>
@@ -3519,9 +3519,48 @@
                 <a:ea typeface="Calibri" pitchFamily="34" charset="-122"/>
                 <a:cs typeface="Calibri" pitchFamily="34" charset="-120"/>
               </a:rPr>
-              <a:t>Team NeonNull   ·   kaggle.com/code/sahilsadhwani25/neonnull-round-3</a:t>
-            </a:r>
-            <a:endParaRPr lang="en-US" sz="1200" dirty="0"/>
+              <a:t>References:  Gilmer et al., Neural Message Passing for Quantum Chemistry, ICML 2017  ·  Ke et al., LightGBM, NeurIPS 2017  ·  Gedeck et al., Avalon fingerprints, JCIM 2006  ·  Ma &amp; Luo, PI1M, JCIM 2020  ·  RDKit</a:t>
+            </a:r>
+            <a:endParaRPr lang="en-US" sz="1050" dirty="0"/>
+          </a:p>
+        </p:txBody>
+      </p:sp>
+      <p:sp>
+        <p:nvSpPr>
+          <p:cNvPr id="8" name="Text 6"/>
+          <p:cNvSpPr txBox="1"/>
+          <p:nvPr/>
+        </p:nvSpPr>
+        <p:spPr>
+          <a:xfrm>
+            <a:off x="822960" y="6172200"/>
+            <a:ext cx="10515600" cy="365760"/>
+          </a:xfrm>
+          <a:prstGeom prst="rect">
+            <a:avLst/>
+          </a:prstGeom>
+          <a:noFill/>
+          <a:ln/>
+        </p:spPr>
+        <p:txBody>
+          <a:bodyPr wrap="square" lIns="0" tIns="0" rIns="0" bIns="0" rtlCol="0" anchor="ctr"/>
+          <a:lstStyle/>
+          <a:p>
+            <a:pPr indent="0" marL="0">
+              <a:buNone/>
+            </a:pPr>
+            <a:r>
+              <a:rPr lang="en-US" sz="1100" dirty="0">
+                <a:solidFill>
+                  <a:srgbClr val="C7D2F0"/>
+                </a:solidFill>
+                <a:latin typeface="Calibri" pitchFamily="34" charset="0"/>
+                <a:ea typeface="Calibri" pitchFamily="34" charset="-122"/>
+                <a:cs typeface="Calibri" pitchFamily="34" charset="-120"/>
+              </a:rPr>
+              <a:t>Team NeonNull   ·   github.com/Sahilo6/amalgam-polymer   ·   kaggle.com/code/sahilsadhwani25/neonnull-round-3</a:t>
+            </a:r>
+            <a:endParaRPr lang="en-US" sz="1100" dirty="0"/>
           </a:p>
         </p:txBody>
       </p:sp>
@@ -4665,7 +4704,7 @@
                 <a:ea typeface="Calibri" pitchFamily="34" charset="-122"/>
                 <a:cs typeface="Calibri" pitchFamily="34" charset="-120"/>
               </a:rPr>
-              <a:t>Gains scale inversely with training rows — exactly what transfer should look like.</a:t>
+              <a:t>Gains concentrate where rows are scarce. EEA is the exception: it was already at R² 0.93, with little left to borrow.</a:t>
             </a:r>
             <a:endParaRPr lang="en-US" sz="1500" dirty="0"/>
           </a:p>
@@ -4687,8 +4726,8 @@
         </p:blipFill>
         <p:spPr>
           <a:xfrm>
-            <a:off x="685800" y="1417320"/>
-            <a:ext cx="6949440" cy="3383280"/>
+            <a:off x="685800" y="1463040"/>
+            <a:ext cx="6949440" cy="3392424"/>
           </a:xfrm>
           <a:prstGeom prst="rect">
             <a:avLst/>
@@ -4755,7 +4794,7 @@
                 <a:ea typeface="Cambria" pitchFamily="34" charset="-122"/>
                 <a:cs typeface="Cambria" pitchFamily="34" charset="-120"/>
               </a:rPr>
-              <a:t>+0.041</a:t>
+              <a:t>+0.056</a:t>
             </a:r>
             <a:endParaRPr lang="en-US" sz="2400" dirty="0"/>
           </a:p>
@@ -4877,7 +4916,7 @@
                 <a:ea typeface="Cambria" pitchFamily="34" charset="-122"/>
                 <a:cs typeface="Cambria" pitchFamily="34" charset="-120"/>
               </a:rPr>
-              <a:t>+0.029</a:t>
+              <a:t>+0.047</a:t>
             </a:r>
             <a:endParaRPr lang="en-US" sz="2400" dirty="0"/>
           </a:p>
@@ -4999,7 +5038,7 @@
                 <a:ea typeface="Cambria" pitchFamily="34" charset="-122"/>
                 <a:cs typeface="Cambria" pitchFamily="34" charset="-120"/>
               </a:rPr>
-              <a:t>+0.007</a:t>
+              <a:t>+0.010</a:t>
             </a:r>
             <a:endParaRPr lang="en-US" sz="2400" dirty="0"/>
           </a:p>
@@ -5094,7 +5133,7 @@
                 <a:ea typeface="Calibri" pitchFamily="34" charset="-122"/>
                 <a:cs typeface="Calibri" pitchFamily="34" charset="-120"/>
               </a:rPr>
-              <a:t>Multi-task over the cluster: +0.0157 on the official metric.</a:t>
+              <a:t>Multi-task over the cluster: +0.0157. Moving it from five folds to ten, at identical compute: a further +0.0058.</a:t>
             </a:r>
             <a:endParaRPr lang="en-US" sz="1500" dirty="0"/>
           </a:p>
@@ -5940,7 +5979,7 @@
                           <a:ea typeface="Calibri" pitchFamily="34" charset="-122"/>
                           <a:cs typeface="Calibri" pitchFamily="34" charset="-120"/>
                         </a:rPr>
-                        <a:t>0.927</a:t>
+                        <a:t>0.930</a:t>
                       </a:r>
                       <a:endParaRPr lang="en-US" sz="1200" dirty="0">
                         <a:latin typeface="Calibri" charset="0"/>
@@ -6008,7 +6047,7 @@
                           <a:ea typeface="Calibri" pitchFamily="34" charset="-122"/>
                           <a:cs typeface="Calibri" pitchFamily="34" charset="-120"/>
                         </a:rPr>
-                        <a:t>0.930</a:t>
+                        <a:t>0.933</a:t>
                       </a:r>
                       <a:endParaRPr lang="en-US" sz="1200" dirty="0">
                         <a:latin typeface="Calibri" charset="0"/>
@@ -6350,7 +6389,7 @@
                           <a:ea typeface="Calibri" pitchFamily="34" charset="-122"/>
                           <a:cs typeface="Calibri" pitchFamily="34" charset="-120"/>
                         </a:rPr>
-                        <a:t>0.958</a:t>
+                        <a:t>0.960</a:t>
                       </a:r>
                       <a:endParaRPr lang="en-US" sz="1200" dirty="0">
                         <a:latin typeface="Calibri" charset="0"/>
@@ -6418,7 +6457,7 @@
                           <a:ea typeface="Calibri" pitchFamily="34" charset="-122"/>
                           <a:cs typeface="Calibri" pitchFamily="34" charset="-120"/>
                         </a:rPr>
-                        <a:t>0.959</a:t>
+                        <a:t>0.961</a:t>
                       </a:r>
                       <a:endParaRPr lang="en-US" sz="1200" dirty="0">
                         <a:latin typeface="Calibri" charset="0"/>
@@ -6760,7 +6799,7 @@
                           <a:ea typeface="Calibri" pitchFamily="34" charset="-122"/>
                           <a:cs typeface="Calibri" pitchFamily="34" charset="-120"/>
                         </a:rPr>
-                        <a:t>0.866</a:t>
+                        <a:t>0.873</a:t>
                       </a:r>
                       <a:endParaRPr lang="en-US" sz="1200" dirty="0">
                         <a:latin typeface="Calibri" charset="0"/>
@@ -6828,7 +6867,7 @@
                           <a:ea typeface="Calibri" pitchFamily="34" charset="-122"/>
                           <a:cs typeface="Calibri" pitchFamily="34" charset="-120"/>
                         </a:rPr>
-                        <a:t>0.864</a:t>
+                        <a:t>0.873</a:t>
                       </a:r>
                       <a:endParaRPr lang="en-US" sz="1200" dirty="0">
                         <a:latin typeface="Calibri" charset="0"/>
@@ -7170,7 +7209,7 @@
                           <a:ea typeface="Calibri" pitchFamily="34" charset="-122"/>
                           <a:cs typeface="Calibri" pitchFamily="34" charset="-120"/>
                         </a:rPr>
-                        <a:t>0.942</a:t>
+                        <a:t>0.936</a:t>
                       </a:r>
                       <a:endParaRPr lang="en-US" sz="1200" dirty="0">
                         <a:latin typeface="Calibri" charset="0"/>
@@ -7238,7 +7277,7 @@
                           <a:ea typeface="Calibri" pitchFamily="34" charset="-122"/>
                           <a:cs typeface="Calibri" pitchFamily="34" charset="-120"/>
                         </a:rPr>
-                        <a:t>0.945</a:t>
+                        <a:t>0.940</a:t>
                       </a:r>
                       <a:endParaRPr lang="en-US" sz="1200" dirty="0">
                         <a:latin typeface="Calibri" charset="0"/>
@@ -7580,7 +7619,7 @@
                           <a:ea typeface="Calibri" pitchFamily="34" charset="-122"/>
                           <a:cs typeface="Calibri" pitchFamily="34" charset="-120"/>
                         </a:rPr>
-                        <a:t>0.834</a:t>
+                        <a:t>0.858</a:t>
                       </a:r>
                       <a:endParaRPr lang="en-US" sz="1200" dirty="0">
                         <a:latin typeface="Calibri" charset="0"/>
@@ -7648,7 +7687,7 @@
                           <a:ea typeface="Calibri" pitchFamily="34" charset="-122"/>
                           <a:cs typeface="Calibri" pitchFamily="34" charset="-120"/>
                         </a:rPr>
-                        <a:t>0.837</a:t>
+                        <a:t>0.855</a:t>
                       </a:r>
                       <a:endParaRPr lang="en-US" sz="1200" dirty="0">
                         <a:latin typeface="Calibri" charset="0"/>
@@ -7990,7 +8029,7 @@
                           <a:ea typeface="Calibri" pitchFamily="34" charset="-122"/>
                           <a:cs typeface="Calibri" pitchFamily="34" charset="-120"/>
                         </a:rPr>
-                        <a:t>0.906</a:t>
+                        <a:t>0.918</a:t>
                       </a:r>
                       <a:endParaRPr lang="en-US" sz="1200" dirty="0">
                         <a:latin typeface="Calibri" charset="0"/>
@@ -8058,7 +8097,7 @@
                           <a:ea typeface="Calibri" pitchFamily="34" charset="-122"/>
                           <a:cs typeface="Calibri" pitchFamily="34" charset="-120"/>
                         </a:rPr>
-                        <a:t>0.903</a:t>
+                        <a:t>0.916</a:t>
                       </a:r>
                       <a:endParaRPr lang="en-US" sz="1200" dirty="0">
                         <a:latin typeface="Calibri" charset="0"/>
@@ -8794,7 +8833,7 @@
                 <a:ea typeface="Calibri" pitchFamily="34" charset="-122"/>
                 <a:cs typeface="Calibri" pitchFamily="34" charset="-120"/>
               </a:rPr>
-              <a:t>Progression across submissions:  </a:t>
+              <a:t>Progression:  </a:t>
             </a:r>
             <a:pPr indent="0" marL="0">
               <a:buNone/>
@@ -8808,7 +8847,7 @@
                 <a:ea typeface="Calibri" pitchFamily="34" charset="-122"/>
                 <a:cs typeface="Calibri" pitchFamily="34" charset="-120"/>
               </a:rPr>
-              <a:t>0.889 per-target  →  0.904 adding the shared encoder  →  0.908 seed-averaged  →  0.914 at ten folds</a:t>
+              <a:t>0.889 per-target  →  0.904 shared encoder  →  0.908 seed-averaged  →  0.914 at ten folds</a:t>
             </a:r>
             <a:endParaRPr lang="en-US" sz="1400" dirty="0"/>
           </a:p>
